--- a/public/fun/pack/pptx/reviewpro/보장점검양식프리미엄_45_사업장점검_베이비블루.pptx
+++ b/public/fun/pack/pptx/reviewpro/보장점검양식프리미엄_45_사업장점검_베이비블루.pptx
@@ -112,12 +112,12 @@
   <p:extLst>
     <p:ext uri="{521415D9-36F7-43E2-AB2F-B90AF26B5E84}">
       <p14:sectionLst xmlns:p14="http://schemas.microsoft.com/office/powerpoint/2010/main">
-        <p14:section name="시작" id="{9FBCEF4C-E4E5-4C2B-A20A-1B0E095FFD1F}">
+        <p14:section name="시작" id="{0092A8F1-D6FC-40F0-912D-1FBADE76F6F4}">
           <p14:sldIdLst>
             <p14:sldId id="256"/>
           </p14:sldIdLst>
         </p14:section>
-        <p14:section name="본문" id="{573271FB-C1B6-4F13-9DD7-9544D1005838}">
+        <p14:section name="본문" id="{95AFF389-CB10-41EE-A571-452C42A23D9E}">
           <p14:sldIdLst>
             <p14:sldId id="257"/>
             <p14:sldId id="258"/>
@@ -1655,7 +1655,7 @@
             </a:lvl1pPr>
           </a:lstStyle>
           <a:p>
-            <a:fld id="{1137AB04-672C-4ED6-B181-3F623A50CBB6}" type="slidenum">
+            <a:fld id="{13BEABEC-5200-4DEC-B4FD-66641ED015E6}" type="slidenum">
               <a:rPr lang="en-US"/>
               <a:t>‹#›</a:t>
             </a:fld>
@@ -2409,7 +2409,7 @@
             </a:lvl1pPr>
           </a:lstStyle>
           <a:p>
-            <a:fld id="{2AAC2A71-19A3-4BC3-9882-E7B03C5B5E16}" type="slidenum">
+            <a:fld id="{9802A11B-1DFF-4F1B-B006-5645390A28E6}" type="slidenum">
               <a:rPr lang="en-US"/>
               <a:t>‹#›</a:t>
             </a:fld>
@@ -3090,7 +3090,7 @@
             </a:lvl1pPr>
           </a:lstStyle>
           <a:p>
-            <a:fld id="{157D4CA2-2C9B-44B1-814B-CDC9B058826D}" type="slidenum">
+            <a:fld id="{9168F5C3-1F2C-4FF6-B295-876A1191E1AB}" type="slidenum">
               <a:rPr lang="en-US"/>
               <a:t>‹#›</a:t>
             </a:fld>
@@ -3931,7 +3931,7 @@
           <a:p>
             <a:r>
               <a:rPr lang="ko-KR"/>
-              <a:t>연말정산 전에 서류를 모읍니다</a:t>
+              <a:t>정산 전에 서류를 모읍니다</a:t>
             </a:r>
           </a:p>
         </p:txBody>
@@ -3953,7 +3953,7 @@
           <a:p>
             <a:r>
               <a:rPr lang="ko-KR"/>
-              <a:t>사업장 점검 · 0000. 00. 00</a:t>
+              <a:t>사업장 점검 · 날짜 입력</a:t>
             </a:r>
           </a:p>
           <a:p>
@@ -4044,7 +4044,7 @@
           <a:bodyPr/>
           <a:lstStyle/>
           <a:p>
-            <a:fld id="{81AE47E6-6FA9-43DB-9262-7FBDAE49AD78}" type="slidenum">
+            <a:fld id="{48362F3B-F7B3-4C2C-BFCF-E976256D76B1}" type="slidenum">
               <a:rPr lang="en-US"/>
               <a:t>‹#›</a:t>
             </a:fld>
@@ -4560,7 +4560,7 @@
           <a:bodyPr/>
           <a:lstStyle/>
           <a:p>
-            <a:fld id="{AC51D160-C359-4138-917E-CDC5F9828754}" type="slidenum">
+            <a:fld id="{F7E0B16B-05E3-4BDA-9414-2102C3829F69}" type="slidenum">
               <a:rPr lang="en-US"/>
               <a:t>‹#›</a:t>
             </a:fld>
@@ -6066,7 +6066,7 @@
           <a:bodyPr/>
           <a:lstStyle/>
           <a:p>
-            <a:fld id="{E8AD8759-51E6-4E10-8B21-DCCB32F0C590}" type="slidenum">
+            <a:fld id="{EFBD7D43-F2BD-4A15-B1B1-E5840D2FB4FD}" type="slidenum">
               <a:rPr lang="en-US"/>
               <a:t>‹#›</a:t>
             </a:fld>
@@ -7616,7 +7616,7 @@
           <a:bodyPr/>
           <a:lstStyle/>
           <a:p>
-            <a:fld id="{3A344AE3-E396-4947-9460-B9167CCC66C5}" type="slidenum">
+            <a:fld id="{27B255BE-D0EC-4BBC-BBF6-22C9DEECAF93}" type="slidenum">
               <a:rPr lang="en-US"/>
               <a:t>‹#›</a:t>
             </a:fld>
@@ -8550,7 +8550,7 @@
           <a:bodyPr/>
           <a:lstStyle/>
           <a:p>
-            <a:fld id="{79B0B727-A923-4111-A3E2-E0AB3E5A7E41}" type="slidenum">
+            <a:fld id="{A64FD267-0751-42BA-8162-581961440609}" type="slidenum">
               <a:rPr lang="en-US"/>
               <a:t>‹#›</a:t>
             </a:fld>
